--- a/onboarding/presentaciones/ONB09_Tu_espacio_personal_AT_WORK.pptx
+++ b/onboarding/presentaciones/ONB09_Tu_espacio_personal_AT_WORK.pptx
@@ -610,6 +610,7 @@
 Y esta carpeta es especialmente importante: 05 · MI PROGRESO.
 Acá quiero que guardes cada Weekly Report que completes durante el programa.
 Aunque después compartas un win, una duda o algo del reporte por WhatsApp, el Weekly Report completo queda guardado acá.
+Y acá también vas a encontrar tu Progress Tracker. El Weekly Report es tu reflexión de cada semana; el Progress Tracker es la foto del recorrido completo: en qué etapa estás, qué skill estás entrenando, qué evidencia fuiste acumulando, qué hitos ya lograste y cuál es el próximo. Lo vamos a ir actualizando juntas, en general al cierre de nuestras sesiones.
 ¿Por qué? Porque al final de estos cinco meses quiero que podamos mirar hacia atrás y ver tu proceso completo: qué te costaba al principio, qué situaciones se repetían, qué empezaste a hacer distinto y qué evidencia concreta tenemos de lo que avanzaste.
 Tu Drive es la memoria de tu proceso.</a:t>
             </a:r>
@@ -2748,7 +2749,7 @@
                 <a:ea typeface="Open Sans" pitchFamily="34" charset="-122"/>
                 <a:cs typeface="Open Sans" pitchFamily="34" charset="-120"/>
               </a:rPr>
-              <a:t>Cada Weekly Report que completes durante el programa</a:t>
+              <a:t>Tus Weekly Reports y tu Progress Tracker: dónde estás en el recorrido</a:t>
             </a:r>
             <a:endParaRPr lang="en-US" sz="1500" dirty="0"/>
           </a:p>

--- a/onboarding/presentaciones/ONB09_Tu_espacio_personal_AT_WORK.pptx
+++ b/onboarding/presentaciones/ONB09_Tu_espacio_personal_AT_WORK.pptx
@@ -610,7 +610,6 @@
 Y esta carpeta es especialmente importante: 05 · MI PROGRESO.
 Acá quiero que guardes cada Weekly Report que completes durante el programa.
 Aunque después compartas un win, una duda o algo del reporte por WhatsApp, el Weekly Report completo queda guardado acá.
-Y acá también vas a encontrar tu Progress Tracker. El Weekly Report es tu reflexión de cada semana; el Progress Tracker es la foto del recorrido completo: en qué etapa estás, qué skill estás entrenando, qué evidencia fuiste acumulando, qué hitos ya lograste y cuál es el próximo. Lo vamos a ir actualizando juntas, en general al cierre de nuestras sesiones.
 ¿Por qué? Porque al final de estos cinco meses quiero que podamos mirar hacia atrás y ver tu proceso completo: qué te costaba al principio, qué situaciones se repetían, qué empezaste a hacer distinto y qué evidencia concreta tenemos de lo que avanzaste.
 Tu Drive es la memoria de tu proceso.</a:t>
             </a:r>
@@ -2749,7 +2748,7 @@
                 <a:ea typeface="Open Sans" pitchFamily="34" charset="-122"/>
                 <a:cs typeface="Open Sans" pitchFamily="34" charset="-120"/>
               </a:rPr>
-              <a:t>Tus Weekly Reports y tu Progress Tracker: dónde estás en el recorrido</a:t>
+              <a:t>Cada Weekly Report que completes durante el programa</a:t>
             </a:r>
             <a:endParaRPr lang="en-US" sz="1500" dirty="0"/>
           </a:p>
